--- a/submission/finals-2026-10-29/CJ-DocGuard-决赛答辩-20261029.pptx
+++ b/submission/finals-2026-10-29/CJ-DocGuard-决赛答辩-20261029.pptx
@@ -775,7 +775,7 @@
           <a:p>
             <a:r>
               <a:rPr lang="en-US" dirty="0"/>
-              <a:t>约45秒。回答是否使用仓颉：CLI核心和HTTP服务均是仓颉；前端仍是浏览器标准技术。C仅承担进程监督和信号桥。Python只在辅助、测试和协议适配中，正式服务不依赖Python HTTP运行时。可信本地代码执行不等于操作系统安全沙箱。</a:t>
+              <a:t>约45秒。回答是否使用仓颉：CLI核心和HTTP服务均是仓颉；前端仍是浏览器标准技术。C仅承担进程监督和信号桥。Python只在辅助、测试和协议适配中，正式服务不依赖Python HTTP运行时。可信本地代码执行不等于操作系统安全沙箱。新增大历史响应保护：请求读取保持并行，响应构造与发送串行化，避免多个大历史JSON同时解析造成内存峰值；保留完整历史，客户端上限16、发送超时5秒，不承诺无限单报告。并发回归结果以本轮最终验证记录为准。</a:t>
             </a:r>
             <a:endParaRPr lang="en-US" dirty="0"/>
           </a:p>
@@ -3532,7 +3532,24 @@
                 <a:ea typeface="Microsoft YaHei" pitchFamily="34" charset="-122"/>
                 <a:cs typeface="Microsoft YaHei" pitchFamily="34" charset="-120"/>
               </a:rPr>
-              <a:t>本地请求、任务、源码编辑</a:t>
+              <a:t>本地请求与任务</a:t>
+            </a:r>
+            <a:endParaRPr lang="en-US" sz="1400" dirty="0"/>
+          </a:p>
+          <a:p>
+            <a:pPr indent="0" marL="0">
+              <a:buNone/>
+            </a:pPr>
+            <a:r>
+              <a:rPr lang="en-US" sz="1400" dirty="0">
+                <a:solidFill>
+                  <a:srgbClr val="006D77"/>
+                </a:solidFill>
+                <a:latin typeface="Microsoft YaHei" pitchFamily="34" charset="0"/>
+                <a:ea typeface="Microsoft YaHei" pitchFamily="34" charset="-122"/>
+                <a:cs typeface="Microsoft YaHei" pitchFamily="34" charset="-120"/>
+              </a:rPr>
+              <a:t>大历史响应有界并发</a:t>
             </a:r>
             <a:endParaRPr lang="en-US" sz="1400" dirty="0"/>
           </a:p>

--- a/submission/finals-2026-10-29/CJ-DocGuard-决赛答辩-20261029.pptx
+++ b/submission/finals-2026-10-29/CJ-DocGuard-决赛答辩-20261029.pptx
@@ -775,7 +775,7 @@
           <a:p>
             <a:r>
               <a:rPr lang="en-US" dirty="0"/>
-              <a:t>约45秒。回答是否使用仓颉：CLI核心和HTTP服务均是仓颉；前端仍是浏览器标准技术。C仅承担进程监督和信号桥。Python只在辅助、测试和协议适配中，正式服务不依赖Python HTTP运行时。可信本地代码执行不等于操作系统安全沙箱。新增大历史响应保护：请求读取保持并行，响应构造与发送串行化，避免多个大历史JSON同时解析造成内存峰值；保留完整历史，客户端上限16、发送超时5秒，不承诺无限单报告。并发回归结果以本轮最终验证记录为准。</a:t>
+              <a:t>约45秒。回答是否使用仓颉：CLI核心和HTTP服务均是仓颉；前端仍是浏览器标准技术。C仅承担进程监督和信号桥。Python只在辅助、测试和协议适配中，正式服务不依赖Python HTTP运行时。可信本地代码执行不等于操作系统安全沙箱。新增大历史响应保护：请求读取保持并行，应用响应仍串行生成；报告与历史JSON分步写入临时文件，再按64KiB分块发送，避免完整大响应同时驻留内存。正常发送或客户端断连均清理临时文件，API与完整历史保持原样，没有使用堆环境变量技巧。客户端上限16、发送超时5秒，不承诺无限单报告。并发及完整套件结果以本轮最终验证记录为准。</a:t>
             </a:r>
             <a:endParaRPr lang="en-US" dirty="0"/>
           </a:p>
@@ -1303,7 +1303,7 @@
           <a:p>
             <a:r>
               <a:rPr lang="en-US" dirty="0"/>
-              <a:t>约40秒。主仓库AtomGit，GitHub镜像。按指南登记真实1.1.3和1.2.0工具链与兼容Apple系统SDK。记录源码冻结身份和后续证据提交，避免自引用摘要。干净克隆验证结果以发布目录回执为准；没有将本机预装工具链说成全新操作系统在线安装验收。</a:t>
+              <a:t>约40秒。主仓库AtomGit，GitHub镜像。按指南登记真实1.1.3和1.2.0工具链与兼容Apple系统SDK。最新版功能源码使用finals-source-20261029-r2；旧finals-source-20261029标签保留为历史，不作为本轮纠正版本入口。记录源码冻结身份和后续证据提交，避免自引用摘要。干净克隆验证结果以发布目录回执为准；没有将本机预装工具链说成全新操作系统在线安装验收。</a:t>
             </a:r>
             <a:endParaRPr lang="en-US" dirty="0"/>
           </a:p>
@@ -3549,7 +3549,7 @@
                 <a:ea typeface="Microsoft YaHei" pitchFamily="34" charset="-122"/>
                 <a:cs typeface="Microsoft YaHei" pitchFamily="34" charset="-120"/>
               </a:rPr>
-              <a:t>大历史响应有界并发</a:t>
+              <a:t>串行生成、分块发送</a:t>
             </a:r>
             <a:endParaRPr lang="en-US" sz="1400" dirty="0"/>
           </a:p>
@@ -7520,7 +7520,7 @@
                 <a:ea typeface="Arial" pitchFamily="34" charset="-122"/>
                 <a:cs typeface="Arial" pitchFamily="34" charset="-120"/>
               </a:rPr>
-              <a:t>finals-source-20261029</a:t>
+              <a:t>finals-source-20261029-r2</a:t>
             </a:r>
             <a:endParaRPr lang="en-US" sz="3000" dirty="0"/>
           </a:p>
